--- a/presentation/slides.pptx
+++ b/presentation/slides.pptx
@@ -7488,7 +7488,7 @@
                 </a:solidFill>
                 <a:latin typeface="Inter"/>
               </a:rPr>
-              <a:t>Free-tier API limits</a:t>
+              <a:t>No source-reputation signal</a:t>
             </a:r>
           </a:p>
         </p:txBody>
@@ -7523,7 +7523,7 @@
                 </a:solidFill>
                 <a:latin typeface="Inter"/>
               </a:rPr>
-              <a:t>Brave Search caps at ~2K queries/month — bounded the corpus to ~1.3K pages.</a:t>
+              <a:t>We score the page itself — text, structure, link topology — not the domain's editorial authority. docs.python.org and a personal blog with the same heading layout score equally; real Google ranking weighs reputation heavily.</a:t>
             </a:r>
           </a:p>
         </p:txBody>
@@ -7558,7 +7558,7 @@
                 </a:solidFill>
                 <a:latin typeface="Inter"/>
               </a:rPr>
-              <a:t>Class imbalance in raw labels</a:t>
+              <a:t>Free-tier API limits</a:t>
             </a:r>
           </a:p>
         </p:txBody>
@@ -7593,7 +7593,7 @@
                 </a:solidFill>
                 <a:latin typeface="Inter"/>
               </a:rPr>
-              <a:t>Mitigated with class_weight + minority oversampling to parity.</a:t>
+              <a:t>Brave Search caps at ~2K queries/month — bounded the corpus to ~1.3K pages.</a:t>
             </a:r>
           </a:p>
         </p:txBody>
@@ -7871,7 +7871,7 @@
                 </a:solidFill>
                 <a:latin typeface="Inter"/>
               </a:rPr>
-              <a:t>Per-domain calibrated thresholds</a:t>
+              <a:t>Domain-authority feature</a:t>
             </a:r>
           </a:p>
         </p:txBody>
@@ -7906,7 +7906,7 @@
                 </a:solidFill>
                 <a:latin typeface="Inter"/>
               </a:rPr>
-              <a:t>0.5 cutoff is naive — real SERPs differ in expected positive rate per domain. Calibrate via Platt / isotonic on a held-out validation slice per host.</a:t>
+              <a:t>Augment the matrix with an external authority signal (Tranco rank, Majestic Trust Flow) so the model can distinguish official-docs from third-party content — directly addresses the reputation gap.</a:t>
             </a:r>
           </a:p>
         </p:txBody>
@@ -7941,7 +7941,7 @@
                 </a:solidFill>
                 <a:latin typeface="Inter"/>
               </a:rPr>
-              <a:t>Periodic re-scrape + drift monitor</a:t>
+              <a:t>Per-domain calibrated thresholds</a:t>
             </a:r>
           </a:p>
         </p:txBody>
@@ -7976,7 +7976,7 @@
                 </a:solidFill>
                 <a:latin typeface="Inter"/>
               </a:rPr>
-              <a:t>SERP rankings shift weekly. Schedule a refresh, log feature drift between snapshots, retrigger training when drift &gt; τ.</a:t>
+              <a:t>0.5 cutoff is naive — real SERPs differ in expected positive rate per domain. Platt / isotonic on a held-out validation slice per host.</a:t>
             </a:r>
           </a:p>
         </p:txBody>
@@ -8046,7 +8046,7 @@
                 </a:solidFill>
                 <a:latin typeface="Inter"/>
               </a:rPr>
-              <a:t>Apply a recommended change to a copy of a page, re-scrape, compare actual rank movement against predicted lift — closes the loop on whether the model is causal or merely correlated.</a:t>
+              <a:t>Apply a recommended change to a copy of a page, re-scrape, compare actual rank movement against predicted lift — closes the loop on causal vs correlated.</a:t>
             </a:r>
           </a:p>
         </p:txBody>
